--- a/site/downloads/flaesh-campus-template.pptx
+++ b/site/downloads/flaesh-campus-template.pptx
@@ -2649,7 +2649,69 @@
       </p:pic>
       <p:sp>
         <p:nvSpPr>
-          <p:cNvPr id="5" name="Episode"/>
+          <p:cNvPr id="5" name="zone-ring"/>
+          <p:cNvSpPr/>
+          <p:nvPr/>
+        </p:nvSpPr>
+        <p:spPr>
+          <a:xfrm>
+            <a:off x="9931400" y="4597400"/>
+            <a:ext cx="1905000" cy="1905000"/>
+          </a:xfrm>
+          <a:prstGeom prst="ellipse">
+            <a:avLst/>
+          </a:prstGeom>
+          <a:solidFill>
+            <a:srgbClr val="FFFFFF"/>
+          </a:solidFill>
+          <a:ln w="25400">
+            <a:solidFill>
+              <a:srgbClr val="00A5FF"/>
+            </a:solidFill>
+          </a:ln>
+          <a:effectLst>
+            <a:glow rad="292100">
+              <a:srgbClr val="00A5FF">
+                <a:alpha val="45000"/>
+              </a:srgbClr>
+            </a:glow>
+          </a:effectLst>
+        </p:spPr>
+        <p:txBody>
+          <a:bodyPr rtlCol="0" anchor="ctr"/>
+          <a:lstStyle/>
+          <a:p>
+            <a:pPr algn="ctr"/>
+          </a:p>
+        </p:txBody>
+      </p:sp>
+      <p:pic>
+        <p:nvPicPr>
+          <p:cNvPr id="6" name="zone-presenter" descr="video-presenter.jpg"/>
+          <p:cNvPicPr>
+            <a:picLocks noChangeAspect="1"/>
+          </p:cNvPicPr>
+          <p:nvPr/>
+        </p:nvPicPr>
+        <p:blipFill>
+          <a:blip r:embed="rId3"/>
+          <a:stretch>
+            <a:fillRect/>
+          </a:stretch>
+        </p:blipFill>
+        <p:spPr>
+          <a:xfrm>
+            <a:off x="9956800" y="4622800"/>
+            <a:ext cx="1854200" cy="1854200"/>
+          </a:xfrm>
+          <a:prstGeom prst="ellipse">
+            <a:avLst/>
+          </a:prstGeom>
+        </p:spPr>
+      </p:pic>
+      <p:sp>
+        <p:nvSpPr>
+          <p:cNvPr id="7" name="Episode"/>
           <p:cNvSpPr>
             <a:spLocks noGrp="1"/>
           </p:cNvSpPr>
@@ -2703,7 +2765,7 @@
       </p:sp>
       <p:sp>
         <p:nvSpPr>
-          <p:cNvPr id="6" name="Kicker"/>
+          <p:cNvPr id="8" name="Kicker"/>
           <p:cNvSpPr>
             <a:spLocks noGrp="1"/>
           </p:cNvSpPr>
@@ -2757,7 +2819,7 @@
       </p:sp>
       <p:sp>
         <p:nvSpPr>
-          <p:cNvPr id="7" name="Title"/>
+          <p:cNvPr id="9" name="Title"/>
           <p:cNvSpPr>
             <a:spLocks noGrp="1"/>
           </p:cNvSpPr>
@@ -2932,7 +2994,69 @@
       </p:pic>
       <p:sp>
         <p:nvSpPr>
-          <p:cNvPr id="5" name="Episode"/>
+          <p:cNvPr id="5" name="zone-ring"/>
+          <p:cNvSpPr/>
+          <p:nvPr/>
+        </p:nvSpPr>
+        <p:spPr>
+          <a:xfrm>
+            <a:off x="9931400" y="4597400"/>
+            <a:ext cx="1905000" cy="1905000"/>
+          </a:xfrm>
+          <a:prstGeom prst="ellipse">
+            <a:avLst/>
+          </a:prstGeom>
+          <a:solidFill>
+            <a:srgbClr val="FFFFFF"/>
+          </a:solidFill>
+          <a:ln w="25400">
+            <a:solidFill>
+              <a:srgbClr val="00A5FF"/>
+            </a:solidFill>
+          </a:ln>
+          <a:effectLst>
+            <a:glow rad="292100">
+              <a:srgbClr val="00A5FF">
+                <a:alpha val="45000"/>
+              </a:srgbClr>
+            </a:glow>
+          </a:effectLst>
+        </p:spPr>
+        <p:txBody>
+          <a:bodyPr rtlCol="0" anchor="ctr"/>
+          <a:lstStyle/>
+          <a:p>
+            <a:pPr algn="ctr"/>
+          </a:p>
+        </p:txBody>
+      </p:sp>
+      <p:pic>
+        <p:nvPicPr>
+          <p:cNvPr id="6" name="zone-presenter" descr="video-presenter.jpg"/>
+          <p:cNvPicPr>
+            <a:picLocks noChangeAspect="1"/>
+          </p:cNvPicPr>
+          <p:nvPr/>
+        </p:nvPicPr>
+        <p:blipFill>
+          <a:blip r:embed="rId3"/>
+          <a:stretch>
+            <a:fillRect/>
+          </a:stretch>
+        </p:blipFill>
+        <p:spPr>
+          <a:xfrm>
+            <a:off x="9956800" y="4622800"/>
+            <a:ext cx="1854200" cy="1854200"/>
+          </a:xfrm>
+          <a:prstGeom prst="ellipse">
+            <a:avLst/>
+          </a:prstGeom>
+        </p:spPr>
+      </p:pic>
+      <p:sp>
+        <p:nvSpPr>
+          <p:cNvPr id="7" name="Episode"/>
           <p:cNvSpPr>
             <a:spLocks noGrp="1"/>
           </p:cNvSpPr>
@@ -2986,7 +3110,7 @@
       </p:sp>
       <p:sp>
         <p:nvSpPr>
-          <p:cNvPr id="6" name="Kicker"/>
+          <p:cNvPr id="8" name="Kicker"/>
           <p:cNvSpPr>
             <a:spLocks noGrp="1"/>
           </p:cNvSpPr>
@@ -3040,7 +3164,7 @@
       </p:sp>
       <p:sp>
         <p:nvSpPr>
-          <p:cNvPr id="7" name="Title"/>
+          <p:cNvPr id="9" name="Title"/>
           <p:cNvSpPr>
             <a:spLocks noGrp="1"/>
           </p:cNvSpPr>
@@ -3215,7 +3339,69 @@
       </p:pic>
       <p:sp>
         <p:nvSpPr>
-          <p:cNvPr id="5" name="Episode"/>
+          <p:cNvPr id="5" name="zone-ring"/>
+          <p:cNvSpPr/>
+          <p:nvPr/>
+        </p:nvSpPr>
+        <p:spPr>
+          <a:xfrm>
+            <a:off x="9931400" y="4597400"/>
+            <a:ext cx="1905000" cy="1905000"/>
+          </a:xfrm>
+          <a:prstGeom prst="ellipse">
+            <a:avLst/>
+          </a:prstGeom>
+          <a:solidFill>
+            <a:srgbClr val="FFFFFF"/>
+          </a:solidFill>
+          <a:ln w="25400">
+            <a:solidFill>
+              <a:srgbClr val="00A5FF"/>
+            </a:solidFill>
+          </a:ln>
+          <a:effectLst>
+            <a:glow rad="292100">
+              <a:srgbClr val="00A5FF">
+                <a:alpha val="45000"/>
+              </a:srgbClr>
+            </a:glow>
+          </a:effectLst>
+        </p:spPr>
+        <p:txBody>
+          <a:bodyPr rtlCol="0" anchor="ctr"/>
+          <a:lstStyle/>
+          <a:p>
+            <a:pPr algn="ctr"/>
+          </a:p>
+        </p:txBody>
+      </p:sp>
+      <p:pic>
+        <p:nvPicPr>
+          <p:cNvPr id="6" name="zone-presenter" descr="video-presenter.jpg"/>
+          <p:cNvPicPr>
+            <a:picLocks noChangeAspect="1"/>
+          </p:cNvPicPr>
+          <p:nvPr/>
+        </p:nvPicPr>
+        <p:blipFill>
+          <a:blip r:embed="rId3"/>
+          <a:stretch>
+            <a:fillRect/>
+          </a:stretch>
+        </p:blipFill>
+        <p:spPr>
+          <a:xfrm>
+            <a:off x="9956800" y="4622800"/>
+            <a:ext cx="1854200" cy="1854200"/>
+          </a:xfrm>
+          <a:prstGeom prst="ellipse">
+            <a:avLst/>
+          </a:prstGeom>
+        </p:spPr>
+      </p:pic>
+      <p:sp>
+        <p:nvSpPr>
+          <p:cNvPr id="7" name="Episode"/>
           <p:cNvSpPr>
             <a:spLocks noGrp="1"/>
           </p:cNvSpPr>
@@ -3269,7 +3455,7 @@
       </p:sp>
       <p:sp>
         <p:nvSpPr>
-          <p:cNvPr id="6" name="Kicker"/>
+          <p:cNvPr id="8" name="Kicker"/>
           <p:cNvSpPr>
             <a:spLocks noGrp="1"/>
           </p:cNvSpPr>
@@ -3323,7 +3509,7 @@
       </p:sp>
       <p:sp>
         <p:nvSpPr>
-          <p:cNvPr id="7" name="Title"/>
+          <p:cNvPr id="9" name="Title"/>
           <p:cNvSpPr>
             <a:spLocks noGrp="1"/>
           </p:cNvSpPr>
@@ -3377,7 +3563,7 @@
       </p:sp>
       <p:sp>
         <p:nvSpPr>
-          <p:cNvPr id="8" name="Points"/>
+          <p:cNvPr id="10" name="Points"/>
           <p:cNvSpPr>
             <a:spLocks noGrp="1"/>
           </p:cNvSpPr>
@@ -3579,7 +3765,69 @@
       </p:pic>
       <p:sp>
         <p:nvSpPr>
-          <p:cNvPr id="5" name="Episode"/>
+          <p:cNvPr id="5" name="zone-ring"/>
+          <p:cNvSpPr/>
+          <p:nvPr/>
+        </p:nvSpPr>
+        <p:spPr>
+          <a:xfrm>
+            <a:off x="9931400" y="4597400"/>
+            <a:ext cx="1905000" cy="1905000"/>
+          </a:xfrm>
+          <a:prstGeom prst="ellipse">
+            <a:avLst/>
+          </a:prstGeom>
+          <a:solidFill>
+            <a:srgbClr val="FFFFFF"/>
+          </a:solidFill>
+          <a:ln w="25400">
+            <a:solidFill>
+              <a:srgbClr val="00A5FF"/>
+            </a:solidFill>
+          </a:ln>
+          <a:effectLst>
+            <a:glow rad="292100">
+              <a:srgbClr val="00A5FF">
+                <a:alpha val="45000"/>
+              </a:srgbClr>
+            </a:glow>
+          </a:effectLst>
+        </p:spPr>
+        <p:txBody>
+          <a:bodyPr rtlCol="0" anchor="ctr"/>
+          <a:lstStyle/>
+          <a:p>
+            <a:pPr algn="ctr"/>
+          </a:p>
+        </p:txBody>
+      </p:sp>
+      <p:pic>
+        <p:nvPicPr>
+          <p:cNvPr id="6" name="zone-presenter" descr="video-presenter.jpg"/>
+          <p:cNvPicPr>
+            <a:picLocks noChangeAspect="1"/>
+          </p:cNvPicPr>
+          <p:nvPr/>
+        </p:nvPicPr>
+        <p:blipFill>
+          <a:blip r:embed="rId3"/>
+          <a:stretch>
+            <a:fillRect/>
+          </a:stretch>
+        </p:blipFill>
+        <p:spPr>
+          <a:xfrm>
+            <a:off x="9956800" y="4622800"/>
+            <a:ext cx="1854200" cy="1854200"/>
+          </a:xfrm>
+          <a:prstGeom prst="ellipse">
+            <a:avLst/>
+          </a:prstGeom>
+        </p:spPr>
+      </p:pic>
+      <p:sp>
+        <p:nvSpPr>
+          <p:cNvPr id="7" name="Episode"/>
           <p:cNvSpPr>
             <a:spLocks noGrp="1"/>
           </p:cNvSpPr>
@@ -3633,7 +3881,7 @@
       </p:sp>
       <p:sp>
         <p:nvSpPr>
-          <p:cNvPr id="6" name="Kicker"/>
+          <p:cNvPr id="8" name="Kicker"/>
           <p:cNvSpPr>
             <a:spLocks noGrp="1"/>
           </p:cNvSpPr>
@@ -3687,7 +3935,7 @@
       </p:sp>
       <p:sp>
         <p:nvSpPr>
-          <p:cNvPr id="7" name="Title"/>
+          <p:cNvPr id="9" name="Title"/>
           <p:cNvSpPr>
             <a:spLocks noGrp="1"/>
           </p:cNvSpPr>
@@ -4261,7 +4509,69 @@
       </p:pic>
       <p:sp>
         <p:nvSpPr>
-          <p:cNvPr id="5" name="Episode"/>
+          <p:cNvPr id="5" name="zone-ring"/>
+          <p:cNvSpPr/>
+          <p:nvPr/>
+        </p:nvSpPr>
+        <p:spPr>
+          <a:xfrm>
+            <a:off x="9931400" y="4597400"/>
+            <a:ext cx="1905000" cy="1905000"/>
+          </a:xfrm>
+          <a:prstGeom prst="ellipse">
+            <a:avLst/>
+          </a:prstGeom>
+          <a:solidFill>
+            <a:srgbClr val="FFFFFF"/>
+          </a:solidFill>
+          <a:ln w="25400">
+            <a:solidFill>
+              <a:srgbClr val="00A5FF"/>
+            </a:solidFill>
+          </a:ln>
+          <a:effectLst>
+            <a:glow rad="292100">
+              <a:srgbClr val="00A5FF">
+                <a:alpha val="45000"/>
+              </a:srgbClr>
+            </a:glow>
+          </a:effectLst>
+        </p:spPr>
+        <p:txBody>
+          <a:bodyPr rtlCol="0" anchor="ctr"/>
+          <a:lstStyle/>
+          <a:p>
+            <a:pPr algn="ctr"/>
+          </a:p>
+        </p:txBody>
+      </p:sp>
+      <p:pic>
+        <p:nvPicPr>
+          <p:cNvPr id="6" name="zone-presenter" descr="video-presenter.jpg"/>
+          <p:cNvPicPr>
+            <a:picLocks noChangeAspect="1"/>
+          </p:cNvPicPr>
+          <p:nvPr/>
+        </p:nvPicPr>
+        <p:blipFill>
+          <a:blip r:embed="rId3"/>
+          <a:stretch>
+            <a:fillRect/>
+          </a:stretch>
+        </p:blipFill>
+        <p:spPr>
+          <a:xfrm>
+            <a:off x="9956800" y="4622800"/>
+            <a:ext cx="1854200" cy="1854200"/>
+          </a:xfrm>
+          <a:prstGeom prst="ellipse">
+            <a:avLst/>
+          </a:prstGeom>
+        </p:spPr>
+      </p:pic>
+      <p:sp>
+        <p:nvSpPr>
+          <p:cNvPr id="7" name="Episode"/>
           <p:cNvSpPr>
             <a:spLocks noGrp="1"/>
           </p:cNvSpPr>
@@ -4315,7 +4625,7 @@
       </p:sp>
       <p:sp>
         <p:nvSpPr>
-          <p:cNvPr id="6" name="Kicker"/>
+          <p:cNvPr id="8" name="Kicker"/>
           <p:cNvSpPr>
             <a:spLocks noGrp="1"/>
           </p:cNvSpPr>
@@ -4369,7 +4679,7 @@
       </p:sp>
       <p:sp>
         <p:nvSpPr>
-          <p:cNvPr id="7" name="Title"/>
+          <p:cNvPr id="9" name="Title"/>
           <p:cNvSpPr>
             <a:spLocks noGrp="1"/>
           </p:cNvSpPr>
@@ -4423,7 +4733,7 @@
       </p:sp>
       <p:sp>
         <p:nvSpPr>
-          <p:cNvPr id="8" name="PhotoBefore"/>
+          <p:cNvPr id="10" name="PhotoBefore"/>
           <p:cNvSpPr>
             <a:spLocks noGrp="1"/>
           </p:cNvSpPr>
@@ -4479,7 +4789,7 @@
       </p:sp>
       <p:sp>
         <p:nvSpPr>
-          <p:cNvPr id="9" name="PhotoAfter"/>
+          <p:cNvPr id="11" name="PhotoAfter"/>
           <p:cNvSpPr>
             <a:spLocks noGrp="1"/>
           </p:cNvSpPr>
@@ -4535,7 +4845,7 @@
       </p:sp>
       <p:sp>
         <p:nvSpPr>
-          <p:cNvPr id="10" name="LabelBefore"/>
+          <p:cNvPr id="12" name="LabelBefore"/>
           <p:cNvSpPr>
             <a:spLocks noGrp="1"/>
           </p:cNvSpPr>
@@ -4589,7 +4899,7 @@
       </p:sp>
       <p:sp>
         <p:nvSpPr>
-          <p:cNvPr id="11" name="LabelAfter"/>
+          <p:cNvPr id="13" name="LabelAfter"/>
           <p:cNvSpPr>
             <a:spLocks noGrp="1"/>
           </p:cNvSpPr>
@@ -4764,7 +5074,69 @@
       </p:pic>
       <p:sp>
         <p:nvSpPr>
-          <p:cNvPr id="5" name="Episode"/>
+          <p:cNvPr id="5" name="zone-ring"/>
+          <p:cNvSpPr/>
+          <p:nvPr/>
+        </p:nvSpPr>
+        <p:spPr>
+          <a:xfrm>
+            <a:off x="9931400" y="4597400"/>
+            <a:ext cx="1905000" cy="1905000"/>
+          </a:xfrm>
+          <a:prstGeom prst="ellipse">
+            <a:avLst/>
+          </a:prstGeom>
+          <a:solidFill>
+            <a:srgbClr val="FFFFFF"/>
+          </a:solidFill>
+          <a:ln w="25400">
+            <a:solidFill>
+              <a:srgbClr val="00A5FF"/>
+            </a:solidFill>
+          </a:ln>
+          <a:effectLst>
+            <a:glow rad="292100">
+              <a:srgbClr val="00A5FF">
+                <a:alpha val="45000"/>
+              </a:srgbClr>
+            </a:glow>
+          </a:effectLst>
+        </p:spPr>
+        <p:txBody>
+          <a:bodyPr rtlCol="0" anchor="ctr"/>
+          <a:lstStyle/>
+          <a:p>
+            <a:pPr algn="ctr"/>
+          </a:p>
+        </p:txBody>
+      </p:sp>
+      <p:pic>
+        <p:nvPicPr>
+          <p:cNvPr id="6" name="zone-presenter" descr="video-presenter.jpg"/>
+          <p:cNvPicPr>
+            <a:picLocks noChangeAspect="1"/>
+          </p:cNvPicPr>
+          <p:nvPr/>
+        </p:nvPicPr>
+        <p:blipFill>
+          <a:blip r:embed="rId3"/>
+          <a:stretch>
+            <a:fillRect/>
+          </a:stretch>
+        </p:blipFill>
+        <p:spPr>
+          <a:xfrm>
+            <a:off x="9956800" y="4622800"/>
+            <a:ext cx="1854200" cy="1854200"/>
+          </a:xfrm>
+          <a:prstGeom prst="ellipse">
+            <a:avLst/>
+          </a:prstGeom>
+        </p:spPr>
+      </p:pic>
+      <p:sp>
+        <p:nvSpPr>
+          <p:cNvPr id="7" name="Episode"/>
           <p:cNvSpPr>
             <a:spLocks noGrp="1"/>
           </p:cNvSpPr>
@@ -4818,7 +5190,7 @@
       </p:sp>
       <p:sp>
         <p:nvSpPr>
-          <p:cNvPr id="6" name="Kicker"/>
+          <p:cNvPr id="8" name="Kicker"/>
           <p:cNvSpPr>
             <a:spLocks noGrp="1"/>
           </p:cNvSpPr>
@@ -4872,7 +5244,7 @@
       </p:sp>
       <p:sp>
         <p:nvSpPr>
-          <p:cNvPr id="7" name="Title"/>
+          <p:cNvPr id="9" name="Title"/>
           <p:cNvSpPr>
             <a:spLocks noGrp="1"/>
           </p:cNvSpPr>
@@ -4926,7 +5298,7 @@
       </p:sp>
       <p:sp>
         <p:nvSpPr>
-          <p:cNvPr id="8" name="Photo"/>
+          <p:cNvPr id="10" name="Photo"/>
           <p:cNvSpPr>
             <a:spLocks noGrp="1"/>
           </p:cNvSpPr>
@@ -5103,7 +5475,69 @@
       </p:pic>
       <p:sp>
         <p:nvSpPr>
-          <p:cNvPr id="5" name="Episode"/>
+          <p:cNvPr id="5" name="zone-ring"/>
+          <p:cNvSpPr/>
+          <p:nvPr/>
+        </p:nvSpPr>
+        <p:spPr>
+          <a:xfrm>
+            <a:off x="9931400" y="4597400"/>
+            <a:ext cx="1905000" cy="1905000"/>
+          </a:xfrm>
+          <a:prstGeom prst="ellipse">
+            <a:avLst/>
+          </a:prstGeom>
+          <a:solidFill>
+            <a:srgbClr val="FFFFFF"/>
+          </a:solidFill>
+          <a:ln w="25400">
+            <a:solidFill>
+              <a:srgbClr val="00A5FF"/>
+            </a:solidFill>
+          </a:ln>
+          <a:effectLst>
+            <a:glow rad="292100">
+              <a:srgbClr val="00A5FF">
+                <a:alpha val="45000"/>
+              </a:srgbClr>
+            </a:glow>
+          </a:effectLst>
+        </p:spPr>
+        <p:txBody>
+          <a:bodyPr rtlCol="0" anchor="ctr"/>
+          <a:lstStyle/>
+          <a:p>
+            <a:pPr algn="ctr"/>
+          </a:p>
+        </p:txBody>
+      </p:sp>
+      <p:pic>
+        <p:nvPicPr>
+          <p:cNvPr id="6" name="zone-presenter" descr="video-presenter.jpg"/>
+          <p:cNvPicPr>
+            <a:picLocks noChangeAspect="1"/>
+          </p:cNvPicPr>
+          <p:nvPr/>
+        </p:nvPicPr>
+        <p:blipFill>
+          <a:blip r:embed="rId3"/>
+          <a:stretch>
+            <a:fillRect/>
+          </a:stretch>
+        </p:blipFill>
+        <p:spPr>
+          <a:xfrm>
+            <a:off x="9956800" y="4622800"/>
+            <a:ext cx="1854200" cy="1854200"/>
+          </a:xfrm>
+          <a:prstGeom prst="ellipse">
+            <a:avLst/>
+          </a:prstGeom>
+        </p:spPr>
+      </p:pic>
+      <p:sp>
+        <p:nvSpPr>
+          <p:cNvPr id="7" name="Episode"/>
           <p:cNvSpPr>
             <a:spLocks noGrp="1"/>
           </p:cNvSpPr>
@@ -5157,7 +5591,7 @@
       </p:sp>
       <p:sp>
         <p:nvSpPr>
-          <p:cNvPr id="6" name="Kicker"/>
+          <p:cNvPr id="8" name="Kicker"/>
           <p:cNvSpPr>
             <a:spLocks noGrp="1"/>
           </p:cNvSpPr>
@@ -5211,7 +5645,7 @@
       </p:sp>
       <p:sp>
         <p:nvSpPr>
-          <p:cNvPr id="7" name="Title"/>
+          <p:cNvPr id="9" name="Title"/>
           <p:cNvSpPr>
             <a:spLocks noGrp="1"/>
           </p:cNvSpPr>
@@ -5265,7 +5699,7 @@
       </p:sp>
       <p:sp>
         <p:nvSpPr>
-          <p:cNvPr id="8" name="Story"/>
+          <p:cNvPr id="10" name="Story"/>
           <p:cNvSpPr>
             <a:spLocks noGrp="1"/>
           </p:cNvSpPr>
@@ -5440,7 +5874,69 @@
       </p:pic>
       <p:sp>
         <p:nvSpPr>
-          <p:cNvPr id="5" name="Episode"/>
+          <p:cNvPr id="5" name="zone-ring"/>
+          <p:cNvSpPr/>
+          <p:nvPr/>
+        </p:nvSpPr>
+        <p:spPr>
+          <a:xfrm>
+            <a:off x="9931400" y="4597400"/>
+            <a:ext cx="1905000" cy="1905000"/>
+          </a:xfrm>
+          <a:prstGeom prst="ellipse">
+            <a:avLst/>
+          </a:prstGeom>
+          <a:solidFill>
+            <a:srgbClr val="232C31"/>
+          </a:solidFill>
+          <a:ln w="25400">
+            <a:solidFill>
+              <a:srgbClr val="00A5FF"/>
+            </a:solidFill>
+          </a:ln>
+          <a:effectLst>
+            <a:glow rad="381000">
+              <a:srgbClr val="00A5FF">
+                <a:alpha val="55000"/>
+              </a:srgbClr>
+            </a:glow>
+          </a:effectLst>
+        </p:spPr>
+        <p:txBody>
+          <a:bodyPr rtlCol="0" anchor="ctr"/>
+          <a:lstStyle/>
+          <a:p>
+            <a:pPr algn="ctr"/>
+          </a:p>
+        </p:txBody>
+      </p:sp>
+      <p:pic>
+        <p:nvPicPr>
+          <p:cNvPr id="6" name="zone-presenter" descr="video-presenter.jpg"/>
+          <p:cNvPicPr>
+            <a:picLocks noChangeAspect="1"/>
+          </p:cNvPicPr>
+          <p:nvPr/>
+        </p:nvPicPr>
+        <p:blipFill>
+          <a:blip r:embed="rId3"/>
+          <a:stretch>
+            <a:fillRect/>
+          </a:stretch>
+        </p:blipFill>
+        <p:spPr>
+          <a:xfrm>
+            <a:off x="9956800" y="4622800"/>
+            <a:ext cx="1854200" cy="1854200"/>
+          </a:xfrm>
+          <a:prstGeom prst="ellipse">
+            <a:avLst/>
+          </a:prstGeom>
+        </p:spPr>
+      </p:pic>
+      <p:sp>
+        <p:nvSpPr>
+          <p:cNvPr id="7" name="Episode"/>
           <p:cNvSpPr>
             <a:spLocks noGrp="1"/>
           </p:cNvSpPr>
@@ -5494,7 +5990,7 @@
       </p:sp>
       <p:sp>
         <p:nvSpPr>
-          <p:cNvPr id="6" name="Kicker"/>
+          <p:cNvPr id="8" name="Kicker"/>
           <p:cNvSpPr>
             <a:spLocks noGrp="1"/>
           </p:cNvSpPr>
@@ -5548,7 +6044,7 @@
       </p:sp>
       <p:sp>
         <p:nvSpPr>
-          <p:cNvPr id="7" name="Question"/>
+          <p:cNvPr id="9" name="Question"/>
           <p:cNvSpPr>
             <a:spLocks noGrp="1"/>
           </p:cNvSpPr>
@@ -5771,7 +6267,69 @@
       </p:pic>
       <p:sp>
         <p:nvSpPr>
-          <p:cNvPr id="6" name="Episode"/>
+          <p:cNvPr id="6" name="zone-ring"/>
+          <p:cNvSpPr/>
+          <p:nvPr/>
+        </p:nvSpPr>
+        <p:spPr>
+          <a:xfrm>
+            <a:off x="9931400" y="4597400"/>
+            <a:ext cx="1905000" cy="1905000"/>
+          </a:xfrm>
+          <a:prstGeom prst="ellipse">
+            <a:avLst/>
+          </a:prstGeom>
+          <a:solidFill>
+            <a:srgbClr val="232C31"/>
+          </a:solidFill>
+          <a:ln w="25400">
+            <a:solidFill>
+              <a:srgbClr val="00A5FF"/>
+            </a:solidFill>
+          </a:ln>
+          <a:effectLst>
+            <a:glow rad="381000">
+              <a:srgbClr val="00A5FF">
+                <a:alpha val="55000"/>
+              </a:srgbClr>
+            </a:glow>
+          </a:effectLst>
+        </p:spPr>
+        <p:txBody>
+          <a:bodyPr rtlCol="0" anchor="ctr"/>
+          <a:lstStyle/>
+          <a:p>
+            <a:pPr algn="ctr"/>
+          </a:p>
+        </p:txBody>
+      </p:sp>
+      <p:pic>
+        <p:nvPicPr>
+          <p:cNvPr id="7" name="zone-presenter" descr="video-presenter.jpg"/>
+          <p:cNvPicPr>
+            <a:picLocks noChangeAspect="1"/>
+          </p:cNvPicPr>
+          <p:nvPr/>
+        </p:nvPicPr>
+        <p:blipFill>
+          <a:blip r:embed="rId3"/>
+          <a:stretch>
+            <a:fillRect/>
+          </a:stretch>
+        </p:blipFill>
+        <p:spPr>
+          <a:xfrm>
+            <a:off x="9956800" y="4622800"/>
+            <a:ext cx="1854200" cy="1854200"/>
+          </a:xfrm>
+          <a:prstGeom prst="ellipse">
+            <a:avLst/>
+          </a:prstGeom>
+        </p:spPr>
+      </p:pic>
+      <p:sp>
+        <p:nvSpPr>
+          <p:cNvPr id="8" name="Episode"/>
           <p:cNvSpPr>
             <a:spLocks noGrp="1"/>
           </p:cNvSpPr>
@@ -5825,7 +6383,7 @@
       </p:sp>
       <p:sp>
         <p:nvSpPr>
-          <p:cNvPr id="7" name="Number"/>
+          <p:cNvPr id="9" name="Number"/>
           <p:cNvSpPr>
             <a:spLocks noGrp="1"/>
           </p:cNvSpPr>
@@ -5889,7 +6447,7 @@
       </p:sp>
       <p:sp>
         <p:nvSpPr>
-          <p:cNvPr id="8" name="Kicker"/>
+          <p:cNvPr id="10" name="Kicker"/>
           <p:cNvSpPr>
             <a:spLocks noGrp="1"/>
           </p:cNvSpPr>
@@ -5943,7 +6501,7 @@
       </p:sp>
       <p:sp>
         <p:nvSpPr>
-          <p:cNvPr id="9" name="Title"/>
+          <p:cNvPr id="11" name="Title"/>
           <p:cNvSpPr>
             <a:spLocks noGrp="1"/>
           </p:cNvSpPr>
@@ -6000,7 +6558,7 @@
       </p:sp>
       <p:sp>
         <p:nvSpPr>
-          <p:cNvPr id="10" name="Line"/>
+          <p:cNvPr id="12" name="Line"/>
           <p:cNvSpPr>
             <a:spLocks noGrp="1"/>
           </p:cNvSpPr>
@@ -6175,7 +6733,69 @@
       </p:pic>
       <p:sp>
         <p:nvSpPr>
-          <p:cNvPr id="5" name="truth-card"/>
+          <p:cNvPr id="5" name="zone-ring"/>
+          <p:cNvSpPr/>
+          <p:nvPr/>
+        </p:nvSpPr>
+        <p:spPr>
+          <a:xfrm>
+            <a:off x="9931400" y="4597400"/>
+            <a:ext cx="1905000" cy="1905000"/>
+          </a:xfrm>
+          <a:prstGeom prst="ellipse">
+            <a:avLst/>
+          </a:prstGeom>
+          <a:solidFill>
+            <a:srgbClr val="232C31"/>
+          </a:solidFill>
+          <a:ln w="25400">
+            <a:solidFill>
+              <a:srgbClr val="00A5FF"/>
+            </a:solidFill>
+          </a:ln>
+          <a:effectLst>
+            <a:glow rad="381000">
+              <a:srgbClr val="00A5FF">
+                <a:alpha val="55000"/>
+              </a:srgbClr>
+            </a:glow>
+          </a:effectLst>
+        </p:spPr>
+        <p:txBody>
+          <a:bodyPr rtlCol="0" anchor="ctr"/>
+          <a:lstStyle/>
+          <a:p>
+            <a:pPr algn="ctr"/>
+          </a:p>
+        </p:txBody>
+      </p:sp>
+      <p:pic>
+        <p:nvPicPr>
+          <p:cNvPr id="6" name="zone-presenter" descr="video-presenter.jpg"/>
+          <p:cNvPicPr>
+            <a:picLocks noChangeAspect="1"/>
+          </p:cNvPicPr>
+          <p:nvPr/>
+        </p:nvPicPr>
+        <p:blipFill>
+          <a:blip r:embed="rId3"/>
+          <a:stretch>
+            <a:fillRect/>
+          </a:stretch>
+        </p:blipFill>
+        <p:spPr>
+          <a:xfrm>
+            <a:off x="9956800" y="4622800"/>
+            <a:ext cx="1854200" cy="1854200"/>
+          </a:xfrm>
+          <a:prstGeom prst="ellipse">
+            <a:avLst/>
+          </a:prstGeom>
+        </p:spPr>
+      </p:pic>
+      <p:sp>
+        <p:nvSpPr>
+          <p:cNvPr id="7" name="truth-card"/>
           <p:cNvSpPr/>
           <p:nvPr/>
         </p:nvSpPr>
@@ -6206,7 +6826,7 @@
       </p:sp>
       <p:sp>
         <p:nvSpPr>
-          <p:cNvPr id="6" name="answer-card"/>
+          <p:cNvPr id="8" name="answer-card"/>
           <p:cNvSpPr/>
           <p:nvPr/>
         </p:nvSpPr>
@@ -6246,7 +6866,7 @@
       </p:sp>
       <p:sp>
         <p:nvSpPr>
-          <p:cNvPr id="7" name="Episode"/>
+          <p:cNvPr id="9" name="Episode"/>
           <p:cNvSpPr>
             <a:spLocks noGrp="1"/>
           </p:cNvSpPr>
@@ -6300,7 +6920,7 @@
       </p:sp>
       <p:sp>
         <p:nvSpPr>
-          <p:cNvPr id="8" name="Kicker"/>
+          <p:cNvPr id="10" name="Kicker"/>
           <p:cNvSpPr>
             <a:spLocks noGrp="1"/>
           </p:cNvSpPr>
@@ -6354,7 +6974,7 @@
       </p:sp>
       <p:sp>
         <p:nvSpPr>
-          <p:cNvPr id="9" name="Quote"/>
+          <p:cNvPr id="11" name="Quote"/>
           <p:cNvSpPr>
             <a:spLocks noGrp="1"/>
           </p:cNvSpPr>
@@ -6408,7 +7028,7 @@
       </p:sp>
       <p:sp>
         <p:nvSpPr>
-          <p:cNvPr id="10" name="TruthLabel"/>
+          <p:cNvPr id="12" name="TruthLabel"/>
           <p:cNvSpPr>
             <a:spLocks noGrp="1"/>
           </p:cNvSpPr>
@@ -6462,7 +7082,7 @@
       </p:sp>
       <p:sp>
         <p:nvSpPr>
-          <p:cNvPr id="11" name="TruthText"/>
+          <p:cNvPr id="13" name="TruthText"/>
           <p:cNvSpPr>
             <a:spLocks noGrp="1"/>
           </p:cNvSpPr>
@@ -6516,7 +7136,7 @@
       </p:sp>
       <p:sp>
         <p:nvSpPr>
-          <p:cNvPr id="12" name="AnswerLabel"/>
+          <p:cNvPr id="14" name="AnswerLabel"/>
           <p:cNvSpPr>
             <a:spLocks noGrp="1"/>
           </p:cNvSpPr>
@@ -6570,7 +7190,7 @@
       </p:sp>
       <p:sp>
         <p:nvSpPr>
-          <p:cNvPr id="13" name="AnswerText"/>
+          <p:cNvPr id="15" name="AnswerText"/>
           <p:cNvSpPr>
             <a:spLocks noGrp="1"/>
           </p:cNvSpPr>
@@ -6745,7 +7365,69 @@
       </p:pic>
       <p:sp>
         <p:nvSpPr>
-          <p:cNvPr id="5" name="next-card"/>
+          <p:cNvPr id="5" name="zone-ring"/>
+          <p:cNvSpPr/>
+          <p:nvPr/>
+        </p:nvSpPr>
+        <p:spPr>
+          <a:xfrm>
+            <a:off x="9931400" y="4597400"/>
+            <a:ext cx="1905000" cy="1905000"/>
+          </a:xfrm>
+          <a:prstGeom prst="ellipse">
+            <a:avLst/>
+          </a:prstGeom>
+          <a:solidFill>
+            <a:srgbClr val="232C31"/>
+          </a:solidFill>
+          <a:ln w="25400">
+            <a:solidFill>
+              <a:srgbClr val="00A5FF"/>
+            </a:solidFill>
+          </a:ln>
+          <a:effectLst>
+            <a:glow rad="381000">
+              <a:srgbClr val="00A5FF">
+                <a:alpha val="55000"/>
+              </a:srgbClr>
+            </a:glow>
+          </a:effectLst>
+        </p:spPr>
+        <p:txBody>
+          <a:bodyPr rtlCol="0" anchor="ctr"/>
+          <a:lstStyle/>
+          <a:p>
+            <a:pPr algn="ctr"/>
+          </a:p>
+        </p:txBody>
+      </p:sp>
+      <p:pic>
+        <p:nvPicPr>
+          <p:cNvPr id="6" name="zone-presenter" descr="video-presenter.jpg"/>
+          <p:cNvPicPr>
+            <a:picLocks noChangeAspect="1"/>
+          </p:cNvPicPr>
+          <p:nvPr/>
+        </p:nvPicPr>
+        <p:blipFill>
+          <a:blip r:embed="rId3"/>
+          <a:stretch>
+            <a:fillRect/>
+          </a:stretch>
+        </p:blipFill>
+        <p:spPr>
+          <a:xfrm>
+            <a:off x="9956800" y="4622800"/>
+            <a:ext cx="1854200" cy="1854200"/>
+          </a:xfrm>
+          <a:prstGeom prst="ellipse">
+            <a:avLst/>
+          </a:prstGeom>
+        </p:spPr>
+      </p:pic>
+      <p:sp>
+        <p:nvSpPr>
+          <p:cNvPr id="7" name="next-card"/>
           <p:cNvSpPr/>
           <p:nvPr/>
         </p:nvSpPr>
@@ -6785,7 +7467,7 @@
       </p:sp>
       <p:sp>
         <p:nvSpPr>
-          <p:cNvPr id="6" name="Episode"/>
+          <p:cNvPr id="8" name="Episode"/>
           <p:cNvSpPr>
             <a:spLocks noGrp="1"/>
           </p:cNvSpPr>
@@ -6839,7 +7521,7 @@
       </p:sp>
       <p:sp>
         <p:nvSpPr>
-          <p:cNvPr id="7" name="Kicker"/>
+          <p:cNvPr id="9" name="Kicker"/>
           <p:cNvSpPr>
             <a:spLocks noGrp="1"/>
           </p:cNvSpPr>
@@ -6893,7 +7575,7 @@
       </p:sp>
       <p:sp>
         <p:nvSpPr>
-          <p:cNvPr id="8" name="Title"/>
+          <p:cNvPr id="10" name="Title"/>
           <p:cNvSpPr>
             <a:spLocks noGrp="1"/>
           </p:cNvSpPr>
@@ -6947,7 +7629,7 @@
       </p:sp>
       <p:sp>
         <p:nvSpPr>
-          <p:cNvPr id="9" name="NextLabel"/>
+          <p:cNvPr id="11" name="NextLabel"/>
           <p:cNvSpPr>
             <a:spLocks noGrp="1"/>
           </p:cNvSpPr>
@@ -7001,7 +7683,7 @@
       </p:sp>
       <p:sp>
         <p:nvSpPr>
-          <p:cNvPr id="10" name="NextTitle"/>
+          <p:cNvPr id="12" name="NextTitle"/>
           <p:cNvSpPr>
             <a:spLocks noGrp="1"/>
           </p:cNvSpPr>
@@ -7055,7 +7737,7 @@
       </p:sp>
       <p:sp>
         <p:nvSpPr>
-          <p:cNvPr id="11" name="NextText"/>
+          <p:cNvPr id="13" name="NextText"/>
           <p:cNvSpPr>
             <a:spLocks noGrp="1"/>
           </p:cNvSpPr>
@@ -7230,7 +7912,69 @@
       </p:pic>
       <p:sp>
         <p:nvSpPr>
-          <p:cNvPr id="5" name="Episode"/>
+          <p:cNvPr id="5" name="zone-ring"/>
+          <p:cNvSpPr/>
+          <p:nvPr/>
+        </p:nvSpPr>
+        <p:spPr>
+          <a:xfrm>
+            <a:off x="9931400" y="4597400"/>
+            <a:ext cx="1905000" cy="1905000"/>
+          </a:xfrm>
+          <a:prstGeom prst="ellipse">
+            <a:avLst/>
+          </a:prstGeom>
+          <a:solidFill>
+            <a:srgbClr val="FFFFFF"/>
+          </a:solidFill>
+          <a:ln w="25400">
+            <a:solidFill>
+              <a:srgbClr val="00A5FF"/>
+            </a:solidFill>
+          </a:ln>
+          <a:effectLst>
+            <a:glow rad="292100">
+              <a:srgbClr val="00A5FF">
+                <a:alpha val="45000"/>
+              </a:srgbClr>
+            </a:glow>
+          </a:effectLst>
+        </p:spPr>
+        <p:txBody>
+          <a:bodyPr rtlCol="0" anchor="ctr"/>
+          <a:lstStyle/>
+          <a:p>
+            <a:pPr algn="ctr"/>
+          </a:p>
+        </p:txBody>
+      </p:sp>
+      <p:pic>
+        <p:nvPicPr>
+          <p:cNvPr id="6" name="zone-presenter" descr="video-presenter.jpg"/>
+          <p:cNvPicPr>
+            <a:picLocks noChangeAspect="1"/>
+          </p:cNvPicPr>
+          <p:nvPr/>
+        </p:nvPicPr>
+        <p:blipFill>
+          <a:blip r:embed="rId3"/>
+          <a:stretch>
+            <a:fillRect/>
+          </a:stretch>
+        </p:blipFill>
+        <p:spPr>
+          <a:xfrm>
+            <a:off x="9956800" y="4622800"/>
+            <a:ext cx="1854200" cy="1854200"/>
+          </a:xfrm>
+          <a:prstGeom prst="ellipse">
+            <a:avLst/>
+          </a:prstGeom>
+        </p:spPr>
+      </p:pic>
+      <p:sp>
+        <p:nvSpPr>
+          <p:cNvPr id="7" name="Episode"/>
           <p:cNvSpPr>
             <a:spLocks noGrp="1"/>
           </p:cNvSpPr>
@@ -7284,7 +8028,7 @@
       </p:sp>
       <p:sp>
         <p:nvSpPr>
-          <p:cNvPr id="6" name="Kicker"/>
+          <p:cNvPr id="8" name="Kicker"/>
           <p:cNvSpPr>
             <a:spLocks noGrp="1"/>
           </p:cNvSpPr>
@@ -7338,7 +8082,7 @@
       </p:sp>
       <p:sp>
         <p:nvSpPr>
-          <p:cNvPr id="7" name="Title"/>
+          <p:cNvPr id="9" name="Title"/>
           <p:cNvSpPr>
             <a:spLocks noGrp="1"/>
           </p:cNvSpPr>
@@ -7392,7 +8136,7 @@
       </p:sp>
       <p:sp>
         <p:nvSpPr>
-          <p:cNvPr id="8" name="Points"/>
+          <p:cNvPr id="10" name="Points"/>
           <p:cNvSpPr>
             <a:spLocks noGrp="1"/>
           </p:cNvSpPr>
@@ -7594,7 +8338,69 @@
       </p:pic>
       <p:sp>
         <p:nvSpPr>
-          <p:cNvPr id="5" name="Episode"/>
+          <p:cNvPr id="5" name="zone-ring"/>
+          <p:cNvSpPr/>
+          <p:nvPr/>
+        </p:nvSpPr>
+        <p:spPr>
+          <a:xfrm>
+            <a:off x="9931400" y="4597400"/>
+            <a:ext cx="1905000" cy="1905000"/>
+          </a:xfrm>
+          <a:prstGeom prst="ellipse">
+            <a:avLst/>
+          </a:prstGeom>
+          <a:solidFill>
+            <a:srgbClr val="FFFFFF"/>
+          </a:solidFill>
+          <a:ln w="25400">
+            <a:solidFill>
+              <a:srgbClr val="00A5FF"/>
+            </a:solidFill>
+          </a:ln>
+          <a:effectLst>
+            <a:glow rad="292100">
+              <a:srgbClr val="00A5FF">
+                <a:alpha val="45000"/>
+              </a:srgbClr>
+            </a:glow>
+          </a:effectLst>
+        </p:spPr>
+        <p:txBody>
+          <a:bodyPr rtlCol="0" anchor="ctr"/>
+          <a:lstStyle/>
+          <a:p>
+            <a:pPr algn="ctr"/>
+          </a:p>
+        </p:txBody>
+      </p:sp>
+      <p:pic>
+        <p:nvPicPr>
+          <p:cNvPr id="6" name="zone-presenter" descr="video-presenter.jpg"/>
+          <p:cNvPicPr>
+            <a:picLocks noChangeAspect="1"/>
+          </p:cNvPicPr>
+          <p:nvPr/>
+        </p:nvPicPr>
+        <p:blipFill>
+          <a:blip r:embed="rId3"/>
+          <a:stretch>
+            <a:fillRect/>
+          </a:stretch>
+        </p:blipFill>
+        <p:spPr>
+          <a:xfrm>
+            <a:off x="9956800" y="4622800"/>
+            <a:ext cx="1854200" cy="1854200"/>
+          </a:xfrm>
+          <a:prstGeom prst="ellipse">
+            <a:avLst/>
+          </a:prstGeom>
+        </p:spPr>
+      </p:pic>
+      <p:sp>
+        <p:nvSpPr>
+          <p:cNvPr id="7" name="Episode"/>
           <p:cNvSpPr>
             <a:spLocks noGrp="1"/>
           </p:cNvSpPr>
@@ -7648,7 +8454,7 @@
       </p:sp>
       <p:sp>
         <p:nvSpPr>
-          <p:cNvPr id="6" name="Kicker"/>
+          <p:cNvPr id="8" name="Kicker"/>
           <p:cNvSpPr>
             <a:spLocks noGrp="1"/>
           </p:cNvSpPr>
@@ -7702,7 +8508,7 @@
       </p:sp>
       <p:sp>
         <p:nvSpPr>
-          <p:cNvPr id="7" name="Title"/>
+          <p:cNvPr id="9" name="Title"/>
           <p:cNvSpPr>
             <a:spLocks noGrp="1"/>
           </p:cNvSpPr>
@@ -7756,7 +8562,7 @@
       </p:sp>
       <p:sp>
         <p:nvSpPr>
-          <p:cNvPr id="8" name="Points"/>
+          <p:cNvPr id="10" name="Points"/>
           <p:cNvSpPr>
             <a:spLocks noGrp="1"/>
           </p:cNvSpPr>
@@ -7837,7 +8643,7 @@
       </p:sp>
       <p:sp>
         <p:nvSpPr>
-          <p:cNvPr id="9" name="Photo"/>
+          <p:cNvPr id="11" name="Photo"/>
           <p:cNvSpPr>
             <a:spLocks noGrp="1"/>
           </p:cNvSpPr>
@@ -7893,7 +8699,7 @@
       </p:sp>
       <p:sp>
         <p:nvSpPr>
-          <p:cNvPr id="10" name="Caption"/>
+          <p:cNvPr id="12" name="Caption"/>
           <p:cNvSpPr>
             <a:spLocks noGrp="1"/>
           </p:cNvSpPr>
@@ -8068,7 +8874,69 @@
       </p:pic>
       <p:sp>
         <p:nvSpPr>
-          <p:cNvPr id="5" name="Episode"/>
+          <p:cNvPr id="5" name="zone-ring"/>
+          <p:cNvSpPr/>
+          <p:nvPr/>
+        </p:nvSpPr>
+        <p:spPr>
+          <a:xfrm>
+            <a:off x="9931400" y="4597400"/>
+            <a:ext cx="1905000" cy="1905000"/>
+          </a:xfrm>
+          <a:prstGeom prst="ellipse">
+            <a:avLst/>
+          </a:prstGeom>
+          <a:solidFill>
+            <a:srgbClr val="FFFFFF"/>
+          </a:solidFill>
+          <a:ln w="25400">
+            <a:solidFill>
+              <a:srgbClr val="00A5FF"/>
+            </a:solidFill>
+          </a:ln>
+          <a:effectLst>
+            <a:glow rad="292100">
+              <a:srgbClr val="00A5FF">
+                <a:alpha val="45000"/>
+              </a:srgbClr>
+            </a:glow>
+          </a:effectLst>
+        </p:spPr>
+        <p:txBody>
+          <a:bodyPr rtlCol="0" anchor="ctr"/>
+          <a:lstStyle/>
+          <a:p>
+            <a:pPr algn="ctr"/>
+          </a:p>
+        </p:txBody>
+      </p:sp>
+      <p:pic>
+        <p:nvPicPr>
+          <p:cNvPr id="6" name="zone-presenter" descr="video-presenter.jpg"/>
+          <p:cNvPicPr>
+            <a:picLocks noChangeAspect="1"/>
+          </p:cNvPicPr>
+          <p:nvPr/>
+        </p:nvPicPr>
+        <p:blipFill>
+          <a:blip r:embed="rId3"/>
+          <a:stretch>
+            <a:fillRect/>
+          </a:stretch>
+        </p:blipFill>
+        <p:spPr>
+          <a:xfrm>
+            <a:off x="9956800" y="4622800"/>
+            <a:ext cx="1854200" cy="1854200"/>
+          </a:xfrm>
+          <a:prstGeom prst="ellipse">
+            <a:avLst/>
+          </a:prstGeom>
+        </p:spPr>
+      </p:pic>
+      <p:sp>
+        <p:nvSpPr>
+          <p:cNvPr id="7" name="Episode"/>
           <p:cNvSpPr>
             <a:spLocks noGrp="1"/>
           </p:cNvSpPr>
@@ -8122,7 +8990,7 @@
       </p:sp>
       <p:sp>
         <p:nvSpPr>
-          <p:cNvPr id="6" name="Kicker"/>
+          <p:cNvPr id="8" name="Kicker"/>
           <p:cNvSpPr>
             <a:spLocks noGrp="1"/>
           </p:cNvSpPr>
@@ -8176,7 +9044,7 @@
       </p:sp>
       <p:sp>
         <p:nvSpPr>
-          <p:cNvPr id="7" name="Title"/>
+          <p:cNvPr id="9" name="Title"/>
           <p:cNvSpPr>
             <a:spLocks noGrp="1"/>
           </p:cNvSpPr>
@@ -8230,7 +9098,7 @@
       </p:sp>
       <p:sp>
         <p:nvSpPr>
-          <p:cNvPr id="8" name="Points"/>
+          <p:cNvPr id="10" name="Points"/>
           <p:cNvSpPr>
             <a:spLocks noGrp="1"/>
           </p:cNvSpPr>
@@ -8432,7 +9300,69 @@
       </p:pic>
       <p:sp>
         <p:nvSpPr>
-          <p:cNvPr id="5" name="Episode"/>
+          <p:cNvPr id="5" name="zone-ring"/>
+          <p:cNvSpPr/>
+          <p:nvPr/>
+        </p:nvSpPr>
+        <p:spPr>
+          <a:xfrm>
+            <a:off x="9931400" y="4597400"/>
+            <a:ext cx="1905000" cy="1905000"/>
+          </a:xfrm>
+          <a:prstGeom prst="ellipse">
+            <a:avLst/>
+          </a:prstGeom>
+          <a:solidFill>
+            <a:srgbClr val="FFFFFF"/>
+          </a:solidFill>
+          <a:ln w="25400">
+            <a:solidFill>
+              <a:srgbClr val="00A5FF"/>
+            </a:solidFill>
+          </a:ln>
+          <a:effectLst>
+            <a:glow rad="292100">
+              <a:srgbClr val="00A5FF">
+                <a:alpha val="45000"/>
+              </a:srgbClr>
+            </a:glow>
+          </a:effectLst>
+        </p:spPr>
+        <p:txBody>
+          <a:bodyPr rtlCol="0" anchor="ctr"/>
+          <a:lstStyle/>
+          <a:p>
+            <a:pPr algn="ctr"/>
+          </a:p>
+        </p:txBody>
+      </p:sp>
+      <p:pic>
+        <p:nvPicPr>
+          <p:cNvPr id="6" name="zone-presenter" descr="video-presenter.jpg"/>
+          <p:cNvPicPr>
+            <a:picLocks noChangeAspect="1"/>
+          </p:cNvPicPr>
+          <p:nvPr/>
+        </p:nvPicPr>
+        <p:blipFill>
+          <a:blip r:embed="rId3"/>
+          <a:stretch>
+            <a:fillRect/>
+          </a:stretch>
+        </p:blipFill>
+        <p:spPr>
+          <a:xfrm>
+            <a:off x="9956800" y="4622800"/>
+            <a:ext cx="1854200" cy="1854200"/>
+          </a:xfrm>
+          <a:prstGeom prst="ellipse">
+            <a:avLst/>
+          </a:prstGeom>
+        </p:spPr>
+      </p:pic>
+      <p:sp>
+        <p:nvSpPr>
+          <p:cNvPr id="7" name="Episode"/>
           <p:cNvSpPr>
             <a:spLocks noGrp="1"/>
           </p:cNvSpPr>
@@ -8486,7 +9416,7 @@
       </p:sp>
       <p:sp>
         <p:nvSpPr>
-          <p:cNvPr id="6" name="Kicker"/>
+          <p:cNvPr id="8" name="Kicker"/>
           <p:cNvSpPr>
             <a:spLocks noGrp="1"/>
           </p:cNvSpPr>
@@ -8540,7 +9470,7 @@
       </p:sp>
       <p:sp>
         <p:nvSpPr>
-          <p:cNvPr id="7" name="Big"/>
+          <p:cNvPr id="9" name="Big"/>
           <p:cNvSpPr>
             <a:spLocks noGrp="1"/>
           </p:cNvSpPr>
@@ -8597,7 +9527,7 @@
       </p:sp>
       <p:sp>
         <p:nvSpPr>
-          <p:cNvPr id="8" name="Statement"/>
+          <p:cNvPr id="10" name="Statement"/>
           <p:cNvSpPr>
             <a:spLocks noGrp="1"/>
           </p:cNvSpPr>
@@ -8651,7 +9581,7 @@
       </p:sp>
       <p:sp>
         <p:nvSpPr>
-          <p:cNvPr id="9" name="Text"/>
+          <p:cNvPr id="11" name="Text"/>
           <p:cNvSpPr>
             <a:spLocks noGrp="1"/>
           </p:cNvSpPr>
@@ -8826,7 +9756,69 @@
       </p:pic>
       <p:sp>
         <p:nvSpPr>
-          <p:cNvPr id="5" name="Episode"/>
+          <p:cNvPr id="5" name="zone-ring"/>
+          <p:cNvSpPr/>
+          <p:nvPr/>
+        </p:nvSpPr>
+        <p:spPr>
+          <a:xfrm>
+            <a:off x="9931400" y="4597400"/>
+            <a:ext cx="1905000" cy="1905000"/>
+          </a:xfrm>
+          <a:prstGeom prst="ellipse">
+            <a:avLst/>
+          </a:prstGeom>
+          <a:solidFill>
+            <a:srgbClr val="FFFFFF"/>
+          </a:solidFill>
+          <a:ln w="25400">
+            <a:solidFill>
+              <a:srgbClr val="00A5FF"/>
+            </a:solidFill>
+          </a:ln>
+          <a:effectLst>
+            <a:glow rad="292100">
+              <a:srgbClr val="00A5FF">
+                <a:alpha val="45000"/>
+              </a:srgbClr>
+            </a:glow>
+          </a:effectLst>
+        </p:spPr>
+        <p:txBody>
+          <a:bodyPr rtlCol="0" anchor="ctr"/>
+          <a:lstStyle/>
+          <a:p>
+            <a:pPr algn="ctr"/>
+          </a:p>
+        </p:txBody>
+      </p:sp>
+      <p:pic>
+        <p:nvPicPr>
+          <p:cNvPr id="6" name="zone-presenter" descr="video-presenter.jpg"/>
+          <p:cNvPicPr>
+            <a:picLocks noChangeAspect="1"/>
+          </p:cNvPicPr>
+          <p:nvPr/>
+        </p:nvPicPr>
+        <p:blipFill>
+          <a:blip r:embed="rId3"/>
+          <a:stretch>
+            <a:fillRect/>
+          </a:stretch>
+        </p:blipFill>
+        <p:spPr>
+          <a:xfrm>
+            <a:off x="9956800" y="4622800"/>
+            <a:ext cx="1854200" cy="1854200"/>
+          </a:xfrm>
+          <a:prstGeom prst="ellipse">
+            <a:avLst/>
+          </a:prstGeom>
+        </p:spPr>
+      </p:pic>
+      <p:sp>
+        <p:nvSpPr>
+          <p:cNvPr id="7" name="Episode"/>
           <p:cNvSpPr>
             <a:spLocks noGrp="1"/>
           </p:cNvSpPr>
@@ -8880,7 +9872,7 @@
       </p:sp>
       <p:sp>
         <p:nvSpPr>
-          <p:cNvPr id="6" name="Kicker"/>
+          <p:cNvPr id="8" name="Kicker"/>
           <p:cNvSpPr>
             <a:spLocks noGrp="1"/>
           </p:cNvSpPr>
@@ -8934,7 +9926,7 @@
       </p:sp>
       <p:sp>
         <p:nvSpPr>
-          <p:cNvPr id="7" name="Title"/>
+          <p:cNvPr id="9" name="Title"/>
           <p:cNvSpPr>
             <a:spLocks noGrp="1"/>
           </p:cNvSpPr>
@@ -15733,6 +16725,68 @@
           </a:p>
         </p:txBody>
       </p:sp>
+      <p:sp>
+        <p:nvSpPr>
+          <p:cNvPr id="18" name="zone-ring-top"/>
+          <p:cNvSpPr/>
+          <p:nvPr/>
+        </p:nvSpPr>
+        <p:spPr>
+          <a:xfrm>
+            <a:off x="9931400" y="4597400"/>
+            <a:ext cx="1905000" cy="1905000"/>
+          </a:xfrm>
+          <a:prstGeom prst="ellipse">
+            <a:avLst/>
+          </a:prstGeom>
+          <a:solidFill>
+            <a:srgbClr val="232C31"/>
+          </a:solidFill>
+          <a:ln w="25400">
+            <a:solidFill>
+              <a:srgbClr val="00A5FF"/>
+            </a:solidFill>
+          </a:ln>
+          <a:effectLst>
+            <a:glow rad="381000">
+              <a:srgbClr val="00A5FF">
+                <a:alpha val="55000"/>
+              </a:srgbClr>
+            </a:glow>
+          </a:effectLst>
+        </p:spPr>
+        <p:txBody>
+          <a:bodyPr rtlCol="0" anchor="ctr"/>
+          <a:lstStyle/>
+          <a:p>
+            <a:pPr algn="ctr"/>
+          </a:p>
+        </p:txBody>
+      </p:sp>
+      <p:pic>
+        <p:nvPicPr>
+          <p:cNvPr id="19" name="zone-presenter-top" descr="image.jpg"/>
+          <p:cNvPicPr>
+            <a:picLocks noChangeAspect="1"/>
+          </p:cNvPicPr>
+          <p:nvPr/>
+        </p:nvPicPr>
+        <p:blipFill>
+          <a:blip r:embed="rId4"/>
+          <a:stretch>
+            <a:fillRect/>
+          </a:stretch>
+        </p:blipFill>
+        <p:spPr>
+          <a:xfrm>
+            <a:off x="9956800" y="4622800"/>
+            <a:ext cx="1854200" cy="1854200"/>
+          </a:xfrm>
+          <a:prstGeom prst="ellipse">
+            <a:avLst/>
+          </a:prstGeom>
+        </p:spPr>
+      </p:pic>
     </p:spTree>
   </p:cSld>
   <p:clrMapOvr>
